--- a/Day32-LLM-Evaluation-and-Quality-Gates/Day32_Deck_LLM_Evaluation_and_Quality_Gates.pptx
+++ b/Day32-LLM-Evaluation-and-Quality-Gates/Day32_Deck_LLM_Evaluation_and_Quality_Gates.pptx
@@ -3736,13 +3736,13 @@
           <a:noFill/>
         </p:spPr>
         <p:txBody>
-          <a:bodyPr wrap="square" lIns="0" rIns="0" tIns="0" bIns="0" anchor="t">
-            <a:spAutoFit/>
-          </a:bodyPr>
-          <a:lstStyle/>
-          <a:p>
-            <a:r>
-              <a:rPr sz="1085" b="0" i="0">
+          <a:bodyPr wrap="none" lIns="0" rIns="0" tIns="0" bIns="0" anchor="t">
+            <a:spAutoFit/>
+          </a:bodyPr>
+          <a:lstStyle/>
+          <a:p>
+            <a:r>
+              <a:rPr sz="954" b="0" i="0">
                 <a:solidFill>
                   <a:srgbClr val="EAF7F5"/>
                 </a:solidFill>
@@ -3753,7 +3753,7 @@
           </a:p>
           <a:p>
             <a:r>
-              <a:rPr sz="1085" b="0" i="0">
+              <a:rPr sz="954" b="0" i="0">
                 <a:solidFill>
                   <a:srgbClr val="EAF7F5"/>
                 </a:solidFill>
@@ -3764,7 +3764,7 @@
           </a:p>
           <a:p>
             <a:r>
-              <a:rPr sz="1085" b="0" i="0">
+              <a:rPr sz="954" b="0" i="0">
                 <a:solidFill>
                   <a:srgbClr val="EAF7F5"/>
                 </a:solidFill>
@@ -3775,7 +3775,7 @@
           </a:p>
           <a:p>
             <a:r>
-              <a:rPr sz="1085" b="0" i="0">
+              <a:rPr sz="954" b="0" i="0">
                 <a:solidFill>
                   <a:srgbClr val="EAF7F5"/>
                 </a:solidFill>
@@ -3786,7 +3786,7 @@
           </a:p>
           <a:p>
             <a:r>
-              <a:rPr sz="1085" b="0" i="0">
+              <a:rPr sz="954" b="0" i="0">
                 <a:solidFill>
                   <a:srgbClr val="EAF7F5"/>
                 </a:solidFill>
@@ -3797,7 +3797,7 @@
           </a:p>
           <a:p>
             <a:r>
-              <a:rPr sz="1085" b="0" i="0">
+              <a:rPr sz="954" b="0" i="0">
                 <a:solidFill>
                   <a:srgbClr val="EAF7F5"/>
                 </a:solidFill>
@@ -3808,7 +3808,7 @@
           </a:p>
           <a:p>
             <a:r>
-              <a:rPr sz="1085" b="0" i="0">
+              <a:rPr sz="954" b="0" i="0">
                 <a:solidFill>
                   <a:srgbClr val="EAF7F5"/>
                 </a:solidFill>
@@ -3819,7 +3819,7 @@
           </a:p>
           <a:p>
             <a:r>
-              <a:rPr sz="1085" b="0" i="0">
+              <a:rPr sz="954" b="0" i="0">
                 <a:solidFill>
                   <a:srgbClr val="EAF7F5"/>
                 </a:solidFill>
@@ -3830,7 +3830,7 @@
           </a:p>
           <a:p>
             <a:r>
-              <a:rPr sz="1085" b="0" i="0">
+              <a:rPr sz="954" b="0" i="0">
                 <a:solidFill>
                   <a:srgbClr val="EAF7F5"/>
                 </a:solidFill>
@@ -3841,7 +3841,7 @@
           </a:p>
           <a:p>
             <a:r>
-              <a:rPr sz="1085" b="0" i="0">
+              <a:rPr sz="954" b="0" i="0">
                 <a:solidFill>
                   <a:srgbClr val="EAF7F5"/>
                 </a:solidFill>
@@ -3852,7 +3852,7 @@
           </a:p>
           <a:p>
             <a:r>
-              <a:rPr sz="1085" b="0" i="0">
+              <a:rPr sz="954" b="0" i="0">
                 <a:solidFill>
                   <a:srgbClr val="EAF7F5"/>
                 </a:solidFill>
@@ -3863,7 +3863,7 @@
           </a:p>
           <a:p>
             <a:r>
-              <a:rPr sz="1085" b="0" i="0">
+              <a:rPr sz="954" b="0" i="0">
                 <a:solidFill>
                   <a:srgbClr val="EAF7F5"/>
                 </a:solidFill>
@@ -3874,7 +3874,7 @@
           </a:p>
           <a:p>
             <a:r>
-              <a:rPr sz="1085" b="0" i="0">
+              <a:rPr sz="954" b="0" i="0">
                 <a:solidFill>
                   <a:srgbClr val="EAF7F5"/>
                 </a:solidFill>
@@ -5706,13 +5706,13 @@
           <a:noFill/>
         </p:spPr>
         <p:txBody>
-          <a:bodyPr wrap="square" lIns="0" rIns="0" tIns="0" bIns="0" anchor="t">
-            <a:spAutoFit/>
-          </a:bodyPr>
-          <a:lstStyle/>
-          <a:p>
-            <a:r>
-              <a:rPr sz="1062" b="0" i="0">
+          <a:bodyPr wrap="none" lIns="0" rIns="0" tIns="0" bIns="0" anchor="t">
+            <a:spAutoFit/>
+          </a:bodyPr>
+          <a:lstStyle/>
+          <a:p>
+            <a:r>
+              <a:rPr sz="935" b="0" i="0">
                 <a:solidFill>
                   <a:srgbClr val="EAF7F5"/>
                 </a:solidFill>
@@ -5723,7 +5723,7 @@
           </a:p>
           <a:p>
             <a:r>
-              <a:rPr sz="1062" b="0" i="0">
+              <a:rPr sz="935" b="0" i="0">
                 <a:solidFill>
                   <a:srgbClr val="EAF7F5"/>
                 </a:solidFill>
@@ -5734,7 +5734,7 @@
           </a:p>
           <a:p>
             <a:r>
-              <a:rPr sz="1062" b="0" i="0">
+              <a:rPr sz="935" b="0" i="0">
                 <a:solidFill>
                   <a:srgbClr val="EAF7F5"/>
                 </a:solidFill>
@@ -5745,7 +5745,7 @@
           </a:p>
           <a:p>
             <a:r>
-              <a:rPr sz="1062" b="0" i="0">
+              <a:rPr sz="935" b="0" i="0">
                 <a:solidFill>
                   <a:srgbClr val="EAF7F5"/>
                 </a:solidFill>
@@ -5756,7 +5756,7 @@
           </a:p>
           <a:p>
             <a:r>
-              <a:rPr sz="1062" b="0" i="0">
+              <a:rPr sz="935" b="0" i="0">
                 <a:solidFill>
                   <a:srgbClr val="EAF7F5"/>
                 </a:solidFill>
@@ -5767,7 +5767,7 @@
           </a:p>
           <a:p>
             <a:r>
-              <a:rPr sz="1062" b="0" i="0">
+              <a:rPr sz="935" b="0" i="0">
                 <a:solidFill>
                   <a:srgbClr val="EAF7F5"/>
                 </a:solidFill>
@@ -5778,7 +5778,7 @@
           </a:p>
           <a:p>
             <a:r>
-              <a:rPr sz="1062" b="0" i="0">
+              <a:rPr sz="935" b="0" i="0">
                 <a:solidFill>
                   <a:srgbClr val="EAF7F5"/>
                 </a:solidFill>
@@ -5789,7 +5789,7 @@
           </a:p>
           <a:p>
             <a:r>
-              <a:rPr sz="1062" b="0" i="0">
+              <a:rPr sz="935" b="0" i="0">
                 <a:solidFill>
                   <a:srgbClr val="EAF7F5"/>
                 </a:solidFill>
@@ -5800,7 +5800,7 @@
           </a:p>
           <a:p>
             <a:r>
-              <a:rPr sz="1062" b="0" i="0">
+              <a:rPr sz="935" b="0" i="0">
                 <a:solidFill>
                   <a:srgbClr val="EAF7F5"/>
                 </a:solidFill>
@@ -5811,7 +5811,7 @@
           </a:p>
           <a:p>
             <a:r>
-              <a:rPr sz="1062" b="0" i="0">
+              <a:rPr sz="935" b="0" i="0">
                 <a:solidFill>
                   <a:srgbClr val="EAF7F5"/>
                 </a:solidFill>
@@ -5822,7 +5822,7 @@
           </a:p>
           <a:p>
             <a:r>
-              <a:rPr sz="1062" b="0" i="0">
+              <a:rPr sz="935" b="0" i="0">
                 <a:solidFill>
                   <a:srgbClr val="EAF7F5"/>
                 </a:solidFill>
@@ -5833,7 +5833,7 @@
           </a:p>
           <a:p>
             <a:r>
-              <a:rPr sz="1062" b="0" i="0">
+              <a:rPr sz="935" b="0" i="0">
                 <a:solidFill>
                   <a:srgbClr val="EAF7F5"/>
                 </a:solidFill>
@@ -5844,7 +5844,7 @@
           </a:p>
           <a:p>
             <a:r>
-              <a:rPr sz="1062" b="0" i="0">
+              <a:rPr sz="935" b="0" i="0">
                 <a:solidFill>
                   <a:srgbClr val="EAF7F5"/>
                 </a:solidFill>
@@ -5855,7 +5855,7 @@
           </a:p>
           <a:p>
             <a:r>
-              <a:rPr sz="1062" b="0" i="0">
+              <a:rPr sz="935" b="0" i="0">
                 <a:solidFill>
                   <a:srgbClr val="EAF7F5"/>
                 </a:solidFill>
@@ -6768,13 +6768,13 @@
           <a:noFill/>
         </p:spPr>
         <p:txBody>
-          <a:bodyPr wrap="square" lIns="0" rIns="0" tIns="0" bIns="0" anchor="t">
-            <a:spAutoFit/>
-          </a:bodyPr>
-          <a:lstStyle/>
-          <a:p>
-            <a:r>
-              <a:rPr sz="1019" b="0" i="0">
+          <a:bodyPr wrap="none" lIns="0" rIns="0" tIns="0" bIns="0" anchor="t">
+            <a:spAutoFit/>
+          </a:bodyPr>
+          <a:lstStyle/>
+          <a:p>
+            <a:r>
+              <a:rPr sz="897" b="0" i="0">
                 <a:solidFill>
                   <a:srgbClr val="EAF7F5"/>
                 </a:solidFill>
@@ -6785,7 +6785,7 @@
           </a:p>
           <a:p>
             <a:r>
-              <a:rPr sz="1019" b="0" i="0">
+              <a:rPr sz="897" b="0" i="0">
                 <a:solidFill>
                   <a:srgbClr val="EAF7F5"/>
                 </a:solidFill>
@@ -6796,7 +6796,7 @@
           </a:p>
           <a:p>
             <a:r>
-              <a:rPr sz="1019" b="0" i="0">
+              <a:rPr sz="897" b="0" i="0">
                 <a:solidFill>
                   <a:srgbClr val="EAF7F5"/>
                 </a:solidFill>
@@ -6807,7 +6807,7 @@
           </a:p>
           <a:p>
             <a:r>
-              <a:rPr sz="1019" b="0" i="0">
+              <a:rPr sz="897" b="0" i="0">
                 <a:solidFill>
                   <a:srgbClr val="EAF7F5"/>
                 </a:solidFill>
@@ -6818,7 +6818,7 @@
           </a:p>
           <a:p>
             <a:r>
-              <a:rPr sz="1019" b="0" i="0">
+              <a:rPr sz="897" b="0" i="0">
                 <a:solidFill>
                   <a:srgbClr val="EAF7F5"/>
                 </a:solidFill>
@@ -6829,7 +6829,7 @@
           </a:p>
           <a:p>
             <a:r>
-              <a:rPr sz="1019" b="0" i="0">
+              <a:rPr sz="897" b="0" i="0">
                 <a:solidFill>
                   <a:srgbClr val="EAF7F5"/>
                 </a:solidFill>
@@ -6840,7 +6840,7 @@
           </a:p>
           <a:p>
             <a:r>
-              <a:rPr sz="1019" b="0" i="0">
+              <a:rPr sz="897" b="0" i="0">
                 <a:solidFill>
                   <a:srgbClr val="EAF7F5"/>
                 </a:solidFill>
